--- a/yunqi-2026-pai-forum/docs/洞察一页-09-从VLA到世界模型：PAI-TurboX加速方案.pptx
+++ b/yunqi-2026-pai-forum/docs/洞察一页-09-从VLA到世界模型：PAI-TurboX加速方案.pptx
@@ -3141,7 +3141,7 @@
         <p:spPr>
           <a:xfrm>
             <a:off x="0" y="0"/>
-            <a:ext cx="12191695" cy="1051560"/>
+            <a:ext cx="12191695" cy="1097280"/>
           </a:xfrm>
           <a:prstGeom prst="rect">
             <a:avLst/>
@@ -3183,8 +3183,8 @@
         </p:nvSpPr>
         <p:spPr>
           <a:xfrm>
-            <a:off x="365760" y="146304"/>
-            <a:ext cx="11430000" cy="274320"/>
+            <a:off x="320040" y="91440"/>
+            <a:ext cx="11521440" cy="237744"/>
           </a:xfrm>
           <a:prstGeom prst="rect">
             <a:avLst/>
@@ -3199,7 +3199,7 @@
           <a:p>
             <a:pPr algn="l"/>
             <a:r>
-              <a:rPr sz="1300" b="0">
+              <a:rPr sz="1200" b="0">
                 <a:solidFill>
                   <a:srgbClr val="6B6B6B"/>
                 </a:solidFill>
@@ -3219,8 +3219,8 @@
         </p:nvSpPr>
         <p:spPr>
           <a:xfrm>
-            <a:off x="365760" y="420624"/>
-            <a:ext cx="11430000" cy="502920"/>
+            <a:off x="320040" y="347472"/>
+            <a:ext cx="11521440" cy="658368"/>
           </a:xfrm>
           <a:prstGeom prst="rect">
             <a:avLst/>
@@ -3235,14 +3235,14 @@
           <a:p>
             <a:pPr algn="l"/>
             <a:r>
-              <a:rPr sz="2000" b="1">
+              <a:rPr sz="1600" b="1">
                 <a:solidFill>
                   <a:srgbClr val="1A1A1A"/>
                 </a:solidFill>
                 <a:latin typeface="Microsoft YaHei"/>
                 <a:ea typeface="Microsoft YaHei"/>
               </a:rPr>
-              <a:t>洞察：TurboX把Physical AI加速拆成运行时、数据、算子与算法沉淀，并与PAI训推产品闭…</a:t>
+              <a:t>洞察：TurboX把Physical AI加速拆成运行时、数据、算子与算法沉淀，并与PAI训推产品闭环。</a:t>
             </a:r>
           </a:p>
         </p:txBody>
@@ -3255,8 +3255,8 @@
         </p:nvSpPr>
         <p:spPr>
           <a:xfrm>
-            <a:off x="320040" y="1207008"/>
-            <a:ext cx="11521440" cy="502920"/>
+            <a:off x="274320" y="1207008"/>
+            <a:ext cx="11612880" cy="749808"/>
           </a:xfrm>
           <a:prstGeom prst="rect">
             <a:avLst/>
@@ -3300,8 +3300,8 @@
         </p:nvSpPr>
         <p:spPr>
           <a:xfrm>
-            <a:off x="457200" y="1298448"/>
-            <a:ext cx="11247120" cy="365760"/>
+            <a:off x="411480" y="1261872"/>
+            <a:ext cx="11338560" cy="640080"/>
           </a:xfrm>
           <a:prstGeom prst="rect">
             <a:avLst/>
@@ -3316,14 +3316,14 @@
           <a:p>
             <a:pPr algn="l"/>
             <a:r>
-              <a:rPr sz="1300" b="1">
+              <a:rPr sz="1200" b="1">
                 <a:solidFill>
                   <a:srgbClr val="1A1A1A"/>
                 </a:solidFill>
                 <a:latin typeface="Microsoft YaHei"/>
                 <a:ea typeface="Microsoft YaHei"/>
               </a:rPr>
-              <a:t>一句话判断：施兴介绍阿里云PAI上的Physical AI加速方案TurboX：覆盖具身智能、智驾训练与世界模型。针对数据供给、算子搬运、显存重算与跨卡通信四类瓶颈，给出流式数据管线、Prefix-LM Attention拆分、A…</a:t>
+              <a:t>一句话判断：施兴介绍阿里云PAI上的Physical AI加速方案TurboX：覆盖具身智能、智驾训练与世界模型。针对数据供给、算子搬运、显存重算与跨卡通信四类瓶颈，给出流式数据管线、Prefix-LM Attention拆分、All-to-All通信与零贡献帧删除等优化，并在世界模型训推上给出显著加速数字与CornerCase多视角生成能力。</a:t>
             </a:r>
           </a:p>
         </p:txBody>
@@ -3336,8 +3336,8 @@
         </p:nvSpPr>
         <p:spPr>
           <a:xfrm>
-            <a:off x="320040" y="1874519"/>
-            <a:ext cx="3703320" cy="2606040"/>
+            <a:off x="274320" y="2084831"/>
+            <a:ext cx="3749039" cy="2267712"/>
           </a:xfrm>
           <a:prstGeom prst="rect">
             <a:avLst/>
@@ -3381,8 +3381,8 @@
         </p:nvSpPr>
         <p:spPr>
           <a:xfrm>
-            <a:off x="457200" y="2011679"/>
-            <a:ext cx="3429000" cy="320040"/>
+            <a:off x="402336" y="2176271"/>
+            <a:ext cx="3493007" cy="292608"/>
           </a:xfrm>
           <a:prstGeom prst="rect">
             <a:avLst/>
@@ -3397,14 +3397,14 @@
           <a:p>
             <a:pPr algn="l"/>
             <a:r>
-              <a:rPr sz="1500" b="1">
+              <a:rPr sz="1400" b="1">
                 <a:solidFill>
                   <a:srgbClr val="8B1A2B"/>
                 </a:solidFill>
                 <a:latin typeface="Microsoft YaHei"/>
                 <a:ea typeface="Microsoft YaHei"/>
               </a:rPr>
-              <a:t>01  TurboX总体架构：工具套件…</a:t>
+              <a:t>01  TurboX总体架构</a:t>
             </a:r>
           </a:p>
         </p:txBody>
@@ -3417,8 +3417,8 @@
         </p:nvSpPr>
         <p:spPr>
           <a:xfrm>
-            <a:off x="484632" y="2377439"/>
-            <a:ext cx="3374136" cy="1965960"/>
+            <a:off x="402336" y="2487167"/>
+            <a:ext cx="3493007" cy="1764792"/>
           </a:xfrm>
           <a:prstGeom prst="rect">
             <a:avLst/>
@@ -3433,28 +3433,45 @@
           <a:p>
             <a:pPr algn="l">
               <a:spcAft>
-                <a:spcPts val="400"/>
+                <a:spcPts val="200"/>
               </a:spcAft>
             </a:pPr>
             <a:r>
-              <a:rPr sz="1200" b="1">
+              <a:rPr sz="1100" b="1">
                 <a:solidFill>
                   <a:srgbClr val="1A1A1A"/>
                 </a:solidFill>
                 <a:latin typeface="Microsoft YaHei"/>
                 <a:ea typeface="Microsoft YaHei"/>
               </a:rPr>
-              <a:t>应用域：具身智能（数据管线/GR00T/Pi/VLA）、智驾训练（BEV系列/Un…</a:t>
+              <a:t>加速方案应产品化为Benchmark/Doctor/Optimizer闭环，并与训推开发环境原生集成，避免「优化脚本散落在客户集群」。</a:t>
             </a:r>
           </a:p>
           <a:p>
             <a:pPr algn="l">
               <a:spcAft>
-                <a:spcPts val="400"/>
+                <a:spcPts val="200"/>
               </a:spcAft>
             </a:pPr>
             <a:r>
-              <a:rPr sz="1200" b="0">
+              <a:rPr sz="1100" b="0">
+                <a:solidFill>
+                  <a:srgbClr val="4A4A4A"/>
+                </a:solidFill>
+                <a:latin typeface="Microsoft YaHei"/>
+                <a:ea typeface="Microsoft YaHei"/>
+              </a:rPr>
+              <a:t>• 应用域：具身智能（数据管线/GR00T/Pi/VLA）、智驾训练（BEV系列/UniAD/Sparse4D）、世界模型（Wan Multiview/Cosmos）</a:t>
+            </a:r>
+          </a:p>
+          <a:p>
+            <a:pPr algn="l">
+              <a:spcAft>
+                <a:spcPts val="200"/>
+              </a:spcAft>
+            </a:pPr>
+            <a:r>
+              <a:rPr sz="1100" b="0">
                 <a:solidFill>
                   <a:srgbClr val="4A4A4A"/>
                 </a:solidFill>
@@ -3467,35 +3484,18 @@
           <a:p>
             <a:pPr algn="l">
               <a:spcAft>
-                <a:spcPts val="400"/>
+                <a:spcPts val="200"/>
               </a:spcAft>
             </a:pPr>
             <a:r>
-              <a:rPr sz="1200" b="0">
+              <a:rPr sz="1100" b="0">
                 <a:solidFill>
                   <a:srgbClr val="4A4A4A"/>
                 </a:solidFill>
                 <a:latin typeface="Microsoft YaHei"/>
                 <a:ea typeface="Microsoft YaHei"/>
               </a:rPr>
-              <a:t>• 四层加速：系统运行时（CPU/NUMA/HugePage，Affinity/NoGIL）、数据与输入（DataLoader/RDL）、…</a:t>
-            </a:r>
-          </a:p>
-          <a:p>
-            <a:pPr algn="l">
-              <a:spcAft>
-                <a:spcPts val="400"/>
-              </a:spcAft>
-            </a:pPr>
-            <a:r>
-              <a:rPr sz="1200" b="0">
-                <a:solidFill>
-                  <a:srgbClr val="4A4A4A"/>
-                </a:solidFill>
-                <a:latin typeface="Microsoft YaHei"/>
-                <a:ea typeface="Microsoft YaHei"/>
-              </a:rPr>
-              <a:t>• 底座闭环：PAI-DSW算法开发、PAI-DLC生产训练、PAI-EAS模型服务。</a:t>
+              <a:t>• 四层加速：系统运行时（CPU/NUMA/HugePage，Affinity/NoGIL）、数据与输入（DataLoader/RDL）、框架与算子（Compile/Graph/Kernel）、算法沉淀（智驾/具身/世界模型）</a:t>
             </a:r>
           </a:p>
         </p:txBody>
@@ -3508,8 +3508,8 @@
         </p:nvSpPr>
         <p:spPr>
           <a:xfrm>
-            <a:off x="4224528" y="1874519"/>
-            <a:ext cx="3703320" cy="2606040"/>
+            <a:off x="4187951" y="2084831"/>
+            <a:ext cx="3749039" cy="2267712"/>
           </a:xfrm>
           <a:prstGeom prst="rect">
             <a:avLst/>
@@ -3553,8 +3553,8 @@
         </p:nvSpPr>
         <p:spPr>
           <a:xfrm>
-            <a:off x="4361688" y="2011679"/>
-            <a:ext cx="3429000" cy="320040"/>
+            <a:off x="4315967" y="2176271"/>
+            <a:ext cx="3493007" cy="292608"/>
           </a:xfrm>
           <a:prstGeom prst="rect">
             <a:avLst/>
@@ -3569,14 +3569,14 @@
           <a:p>
             <a:pPr algn="l"/>
             <a:r>
-              <a:rPr sz="1500" b="1">
+              <a:rPr sz="1400" b="1">
                 <a:solidFill>
                   <a:srgbClr val="8B1A2B"/>
                 </a:solidFill>
                 <a:latin typeface="Microsoft YaHei"/>
                 <a:ea typeface="Microsoft YaHei"/>
               </a:rPr>
-              <a:t>02  计算瓶颈画像：数据、算子、显存…</a:t>
+              <a:t>02  数据、算子、显存与通信</a:t>
             </a:r>
           </a:p>
         </p:txBody>
@@ -3589,8 +3589,8 @@
         </p:nvSpPr>
         <p:spPr>
           <a:xfrm>
-            <a:off x="4389120" y="2377439"/>
-            <a:ext cx="3374136" cy="1965960"/>
+            <a:off x="4315967" y="2487167"/>
+            <a:ext cx="3493007" cy="1764792"/>
           </a:xfrm>
           <a:prstGeom prst="rect">
             <a:avLst/>
@@ -3605,45 +3605,62 @@
           <a:p>
             <a:pPr algn="l">
               <a:spcAft>
-                <a:spcPts val="400"/>
+                <a:spcPts val="200"/>
               </a:spcAft>
             </a:pPr>
             <a:r>
-              <a:rPr sz="1200" b="1">
+              <a:rPr sz="1100" b="1">
                 <a:solidFill>
                   <a:srgbClr val="1A1A1A"/>
                 </a:solidFill>
                 <a:latin typeface="Microsoft YaHei"/>
                 <a:ea typeface="Microsoft YaHei"/>
               </a:rPr>
-              <a:t>数据供给与调度：具身视频管线/智驾与VLA训练中，预处理未完成导致下游等待，上游占…</a:t>
+              <a:t>优化前先做瓶颈分型：输入等待、小算子搬运、显存重算、跨卡无效通信</a:t>
             </a:r>
           </a:p>
           <a:p>
             <a:pPr algn="l">
               <a:spcAft>
-                <a:spcPts val="400"/>
+                <a:spcPts val="200"/>
               </a:spcAft>
             </a:pPr>
             <a:r>
-              <a:rPr sz="1200" b="0">
+              <a:rPr sz="1100" b="0">
                 <a:solidFill>
                   <a:srgbClr val="4A4A4A"/>
                 </a:solidFill>
                 <a:latin typeface="Microsoft YaHei"/>
                 <a:ea typeface="Microsoft YaHei"/>
               </a:rPr>
-              <a:t>• 计算与数据搬运：BEV/VLA/世界模型中小算子过多导致中间结果反复读写；不变输入（文本Prompt/参考图）被重复送入编码器。</a:t>
+              <a:t>• 数据供给与调度：具身视频管线/智驾与VLA训练中，预处理未完成导致下游等待，上游占满GPU下游排队。</a:t>
             </a:r>
           </a:p>
           <a:p>
             <a:pPr algn="l">
               <a:spcAft>
-                <a:spcPts val="400"/>
+                <a:spcPts val="200"/>
               </a:spcAft>
             </a:pPr>
             <a:r>
-              <a:rPr sz="1200" b="0">
+              <a:rPr sz="1100" b="0">
+                <a:solidFill>
+                  <a:srgbClr val="4A4A4A"/>
+                </a:solidFill>
+                <a:latin typeface="Microsoft YaHei"/>
+                <a:ea typeface="Microsoft YaHei"/>
+              </a:rPr>
+              <a:t>• 计算与数据搬运：BEV/VLA/世界模型中小算子过多导致中间结果反复读写</a:t>
+            </a:r>
+          </a:p>
+          <a:p>
+            <a:pPr algn="l">
+              <a:spcAft>
+                <a:spcPts val="200"/>
+              </a:spcAft>
+            </a:pPr>
+            <a:r>
+              <a:rPr sz="1100" b="0">
                 <a:solidFill>
                   <a:srgbClr val="4A4A4A"/>
                 </a:solidFill>
@@ -3653,23 +3670,6 @@
               <a:t>• 显存与重复计算：多视角长序列激活与状态挤占显存，Batch受限并被迫重算，进一步拉长训练。</a:t>
             </a:r>
           </a:p>
-          <a:p>
-            <a:pPr algn="l">
-              <a:spcAft>
-                <a:spcPts val="400"/>
-              </a:spcAft>
-            </a:pPr>
-            <a:r>
-              <a:rPr sz="1200" b="0">
-                <a:solidFill>
-                  <a:srgbClr val="4A4A4A"/>
-                </a:solidFill>
-                <a:latin typeface="Microsoft YaHei"/>
-                <a:ea typeface="Microsoft YaHei"/>
-              </a:rPr>
-              <a:t>• 通信与跨卡等待：多机训练/多视角特征交换中Gather后再Split，产生无效传输。</a:t>
-            </a:r>
-          </a:p>
         </p:txBody>
       </p:sp>
       <p:sp>
@@ -3680,8 +3680,8 @@
         </p:nvSpPr>
         <p:spPr>
           <a:xfrm>
-            <a:off x="8129016" y="1874519"/>
-            <a:ext cx="3703320" cy="2606040"/>
+            <a:off x="8101582" y="2084831"/>
+            <a:ext cx="3749039" cy="2267712"/>
           </a:xfrm>
           <a:prstGeom prst="rect">
             <a:avLst/>
@@ -3725,8 +3725,8 @@
         </p:nvSpPr>
         <p:spPr>
           <a:xfrm>
-            <a:off x="8266176" y="2011679"/>
-            <a:ext cx="3429000" cy="320040"/>
+            <a:off x="8229598" y="2176271"/>
+            <a:ext cx="3493007" cy="292608"/>
           </a:xfrm>
           <a:prstGeom prst="rect">
             <a:avLst/>
@@ -3741,14 +3741,14 @@
           <a:p>
             <a:pPr algn="l"/>
             <a:r>
-              <a:rPr sz="1500" b="1">
+              <a:rPr sz="1400" b="1">
                 <a:solidFill>
                   <a:srgbClr val="8B1A2B"/>
                 </a:solidFill>
                 <a:latin typeface="Microsoft YaHei"/>
                 <a:ea typeface="Microsoft YaHei"/>
               </a:rPr>
-              <a:t>03  具身智能数据管线：流式并行与资…</a:t>
+              <a:t>03  流式并行与资源协同</a:t>
             </a:r>
           </a:p>
         </p:txBody>
@@ -3761,8 +3761,8 @@
         </p:nvSpPr>
         <p:spPr>
           <a:xfrm>
-            <a:off x="8293608" y="2377439"/>
-            <a:ext cx="3374136" cy="1965960"/>
+            <a:off x="8229598" y="2487167"/>
+            <a:ext cx="3493007" cy="1764792"/>
           </a:xfrm>
           <a:prstGeom prst="rect">
             <a:avLst/>
@@ -3777,28 +3777,45 @@
           <a:p>
             <a:pPr algn="l">
               <a:spcAft>
-                <a:spcPts val="400"/>
+                <a:spcPts val="200"/>
               </a:spcAft>
             </a:pPr>
             <a:r>
-              <a:rPr sz="1200" b="1">
+              <a:rPr sz="1100" b="1">
                 <a:solidFill>
                   <a:srgbClr val="1A1A1A"/>
                 </a:solidFill>
                 <a:latin typeface="Microsoft YaHei"/>
                 <a:ea typeface="Microsoft YaHei"/>
               </a:rPr>
-              <a:t>流式处理：片段就绪即进入下一阶段，重叠工具处理/三维重建/切图校验/VLM标注/转…</a:t>
+              <a:t>具身数据管线应默认流式DAG与细粒度切分</a:t>
             </a:r>
           </a:p>
           <a:p>
             <a:pPr algn="l">
               <a:spcAft>
-                <a:spcPts val="400"/>
+                <a:spcPts val="200"/>
               </a:spcAft>
             </a:pPr>
             <a:r>
-              <a:rPr sz="1200" b="0">
+              <a:rPr sz="1100" b="0">
+                <a:solidFill>
+                  <a:srgbClr val="4A4A4A"/>
+                </a:solidFill>
+                <a:latin typeface="Microsoft YaHei"/>
+                <a:ea typeface="Microsoft YaHei"/>
+              </a:rPr>
+              <a:t>• 流式处理：片段就绪即进入下一阶段，重叠工具处理/三维重建/切图校验/VLM标注/转换导出。</a:t>
+            </a:r>
+          </a:p>
+          <a:p>
+            <a:pPr algn="l">
+              <a:spcAft>
+                <a:spcPts val="200"/>
+              </a:spcAft>
+            </a:pPr>
+            <a:r>
+              <a:rPr sz="1100" b="0">
                 <a:solidFill>
                   <a:srgbClr val="4A4A4A"/>
                 </a:solidFill>
@@ -3811,11 +3828,11 @@
           <a:p>
             <a:pPr algn="l">
               <a:spcAft>
-                <a:spcPts val="400"/>
+                <a:spcPts val="200"/>
               </a:spcAft>
             </a:pPr>
             <a:r>
-              <a:rPr sz="1200" b="0">
+              <a:rPr sz="1100" b="0">
                 <a:solidFill>
                   <a:srgbClr val="4A4A4A"/>
                 </a:solidFill>
@@ -3825,23 +3842,6 @@
               <a:t>• 取消整批等待：已完成窗口立即拼接，不等最慢片段。</a:t>
             </a:r>
           </a:p>
-          <a:p>
-            <a:pPr algn="l">
-              <a:spcAft>
-                <a:spcPts val="400"/>
-              </a:spcAft>
-            </a:pPr>
-            <a:r>
-              <a:rPr sz="1200" b="0">
-                <a:solidFill>
-                  <a:srgbClr val="4A4A4A"/>
-                </a:solidFill>
-                <a:latin typeface="Microsoft YaHei"/>
-                <a:ea typeface="Microsoft YaHei"/>
-              </a:rPr>
-              <a:t>• 合理分配GPU：提前启动VLM标注并保持并发，避免GPU空转。</a:t>
-            </a:r>
-          </a:p>
         </p:txBody>
       </p:sp>
       <p:sp>
@@ -3852,8 +3852,8 @@
         </p:nvSpPr>
         <p:spPr>
           <a:xfrm>
-            <a:off x="320040" y="4617720"/>
-            <a:ext cx="7315200" cy="256032"/>
+            <a:off x="274320" y="4553712"/>
+            <a:ext cx="7315200" cy="237744"/>
           </a:xfrm>
           <a:prstGeom prst="rect">
             <a:avLst/>
@@ -3868,7 +3868,7 @@
           <a:p>
             <a:pPr algn="l"/>
             <a:r>
-              <a:rPr sz="1400" b="1">
+              <a:rPr sz="1300" b="1">
                 <a:solidFill>
                   <a:srgbClr val="1A1A1A"/>
                 </a:solidFill>
@@ -3888,8 +3888,8 @@
         </p:nvSpPr>
         <p:spPr>
           <a:xfrm>
-            <a:off x="320040" y="4910328"/>
-            <a:ext cx="1847088" cy="868680"/>
+            <a:off x="274320" y="4809744"/>
+            <a:ext cx="1874519" cy="960120"/>
           </a:xfrm>
           <a:prstGeom prst="rect">
             <a:avLst/>
@@ -3933,8 +3933,8 @@
         </p:nvSpPr>
         <p:spPr>
           <a:xfrm>
-            <a:off x="429768" y="4965192"/>
-            <a:ext cx="1664208" cy="201168"/>
+            <a:off x="365760" y="4864608"/>
+            <a:ext cx="1709927" cy="201168"/>
           </a:xfrm>
           <a:prstGeom prst="rect">
             <a:avLst/>
@@ -3956,7 +3956,7 @@
                 <a:latin typeface="Microsoft YaHei"/>
                 <a:ea typeface="Microsoft YaHei"/>
               </a:rPr>
-              <a:t>TurboX总体架构：…</a:t>
+              <a:t>TurboX总体架构</a:t>
             </a:r>
           </a:p>
         </p:txBody>
@@ -3969,8 +3969,8 @@
         </p:nvSpPr>
         <p:spPr>
           <a:xfrm>
-            <a:off x="429768" y="5166360"/>
-            <a:ext cx="1664208" cy="237744"/>
+            <a:off x="365760" y="5065776"/>
+            <a:ext cx="1709927" cy="256032"/>
           </a:xfrm>
           <a:prstGeom prst="rect">
             <a:avLst/>
@@ -3992,7 +3992,7 @@
                 <a:latin typeface="Microsoft YaHei"/>
                 <a:ea typeface="Microsoft YaHei"/>
               </a:rPr>
-              <a:t>应用域：具身智能（数据管线/G…</a:t>
+              <a:t>核心口径</a:t>
             </a:r>
           </a:p>
         </p:txBody>
@@ -4005,8 +4005,8 @@
         </p:nvSpPr>
         <p:spPr>
           <a:xfrm>
-            <a:off x="429768" y="5413248"/>
-            <a:ext cx="1664208" cy="292608"/>
+            <a:off x="365760" y="5340096"/>
+            <a:ext cx="1709927" cy="365760"/>
           </a:xfrm>
           <a:prstGeom prst="rect">
             <a:avLst/>
@@ -4021,14 +4021,14 @@
           <a:p>
             <a:pPr algn="l"/>
             <a:r>
-              <a:rPr sz="1400" b="1">
+              <a:rPr sz="1200" b="1">
                 <a:solidFill>
                   <a:srgbClr val="8B1A2B"/>
                 </a:solidFill>
                 <a:latin typeface="Microsoft YaHei"/>
                 <a:ea typeface="Microsoft YaHei"/>
               </a:rPr>
-              <a:t>应用域：具身智能（数据管线…</a:t>
+              <a:t>应用域：具身智能（数据管线/GR00T/Pi/VLA）、智驾训练（BEV系列/UniAD/Sparse4D）、世界模型（Wan Multiview/Cosmos）。</a:t>
             </a:r>
           </a:p>
         </p:txBody>
@@ -4041,8 +4041,8 @@
         </p:nvSpPr>
         <p:spPr>
           <a:xfrm>
-            <a:off x="2276856" y="4910328"/>
-            <a:ext cx="1847088" cy="868680"/>
+            <a:off x="2240279" y="4809744"/>
+            <a:ext cx="1874519" cy="960120"/>
           </a:xfrm>
           <a:prstGeom prst="rect">
             <a:avLst/>
@@ -4086,8 +4086,8 @@
         </p:nvSpPr>
         <p:spPr>
           <a:xfrm>
-            <a:off x="2386584" y="4965192"/>
-            <a:ext cx="1664208" cy="201168"/>
+            <a:off x="2331719" y="4864608"/>
+            <a:ext cx="1709927" cy="201168"/>
           </a:xfrm>
           <a:prstGeom prst="rect">
             <a:avLst/>
@@ -4109,7 +4109,7 @@
                 <a:latin typeface="Microsoft YaHei"/>
                 <a:ea typeface="Microsoft YaHei"/>
               </a:rPr>
-              <a:t>计算瓶颈画像：数据、算…</a:t>
+              <a:t>数据、算子、显存与通信</a:t>
             </a:r>
           </a:p>
         </p:txBody>
@@ -4122,8 +4122,8 @@
         </p:nvSpPr>
         <p:spPr>
           <a:xfrm>
-            <a:off x="2386584" y="5166360"/>
-            <a:ext cx="1664208" cy="237744"/>
+            <a:off x="2331719" y="5065776"/>
+            <a:ext cx="1709927" cy="256032"/>
           </a:xfrm>
           <a:prstGeom prst="rect">
             <a:avLst/>
@@ -4145,7 +4145,7 @@
                 <a:latin typeface="Microsoft YaHei"/>
                 <a:ea typeface="Microsoft YaHei"/>
               </a:rPr>
-              <a:t>数据供给与调度：具身视频管线/…</a:t>
+              <a:t>核心口径</a:t>
             </a:r>
           </a:p>
         </p:txBody>
@@ -4158,8 +4158,8 @@
         </p:nvSpPr>
         <p:spPr>
           <a:xfrm>
-            <a:off x="2386584" y="5413248"/>
-            <a:ext cx="1664208" cy="292608"/>
+            <a:off x="2331719" y="5340096"/>
+            <a:ext cx="1709927" cy="365760"/>
           </a:xfrm>
           <a:prstGeom prst="rect">
             <a:avLst/>
@@ -4174,14 +4174,14 @@
           <a:p>
             <a:pPr algn="l"/>
             <a:r>
-              <a:rPr sz="1400" b="1">
+              <a:rPr sz="1200" b="1">
                 <a:solidFill>
                   <a:srgbClr val="8B1A2B"/>
                 </a:solidFill>
                 <a:latin typeface="Microsoft YaHei"/>
                 <a:ea typeface="Microsoft YaHei"/>
               </a:rPr>
-              <a:t>数据供给与调度：具身视频管…</a:t>
+              <a:t>数据供给与调度：具身视频管线/智驾与VLA训练中</a:t>
             </a:r>
           </a:p>
         </p:txBody>
@@ -4194,8 +4194,8 @@
         </p:nvSpPr>
         <p:spPr>
           <a:xfrm>
-            <a:off x="4233672" y="4910328"/>
-            <a:ext cx="1847088" cy="868680"/>
+            <a:off x="4206238" y="4809744"/>
+            <a:ext cx="1874519" cy="960120"/>
           </a:xfrm>
           <a:prstGeom prst="rect">
             <a:avLst/>
@@ -4239,8 +4239,8 @@
         </p:nvSpPr>
         <p:spPr>
           <a:xfrm>
-            <a:off x="4343400" y="4965192"/>
-            <a:ext cx="1664208" cy="201168"/>
+            <a:off x="4297678" y="4864608"/>
+            <a:ext cx="1709927" cy="201168"/>
           </a:xfrm>
           <a:prstGeom prst="rect">
             <a:avLst/>
@@ -4262,7 +4262,7 @@
                 <a:latin typeface="Microsoft YaHei"/>
                 <a:ea typeface="Microsoft YaHei"/>
               </a:rPr>
-              <a:t>具身智能数据管线：流式…</a:t>
+              <a:t>流式并行与资源协同</a:t>
             </a:r>
           </a:p>
         </p:txBody>
@@ -4275,8 +4275,8 @@
         </p:nvSpPr>
         <p:spPr>
           <a:xfrm>
-            <a:off x="4343400" y="5166360"/>
-            <a:ext cx="1664208" cy="237744"/>
+            <a:off x="4297678" y="5065776"/>
+            <a:ext cx="1709927" cy="256032"/>
           </a:xfrm>
           <a:prstGeom prst="rect">
             <a:avLst/>
@@ -4298,7 +4298,7 @@
                 <a:latin typeface="Microsoft YaHei"/>
                 <a:ea typeface="Microsoft YaHei"/>
               </a:rPr>
-              <a:t>细粒度拆分：总时延约降83%（…</a:t>
+              <a:t>流式处理时延约降56%（示例对比54</a:t>
             </a:r>
           </a:p>
         </p:txBody>
@@ -4311,8 +4311,8 @@
         </p:nvSpPr>
         <p:spPr>
           <a:xfrm>
-            <a:off x="4343400" y="5413248"/>
-            <a:ext cx="1664208" cy="292608"/>
+            <a:off x="4297678" y="5340096"/>
+            <a:ext cx="1709927" cy="365760"/>
           </a:xfrm>
           <a:prstGeom prst="rect">
             <a:avLst/>
@@ -4327,14 +4327,14 @@
           <a:p>
             <a:pPr algn="l"/>
             <a:r>
-              <a:rPr sz="1400" b="1">
+              <a:rPr sz="1200" b="1">
                 <a:solidFill>
                   <a:srgbClr val="8B1A2B"/>
                 </a:solidFill>
                 <a:latin typeface="Microsoft YaHei"/>
                 <a:ea typeface="Microsoft YaHei"/>
               </a:rPr>
-              <a:t>立即拼接：示例时延约降24%（17…</a:t>
+              <a:t>24）</a:t>
             </a:r>
           </a:p>
         </p:txBody>
@@ -4347,8 +4347,8 @@
         </p:nvSpPr>
         <p:spPr>
           <a:xfrm>
-            <a:off x="6190488" y="4910328"/>
-            <a:ext cx="1847088" cy="868680"/>
+            <a:off x="6172197" y="4809744"/>
+            <a:ext cx="1874519" cy="960120"/>
           </a:xfrm>
           <a:prstGeom prst="rect">
             <a:avLst/>
@@ -4392,8 +4392,8 @@
         </p:nvSpPr>
         <p:spPr>
           <a:xfrm>
-            <a:off x="6300216" y="4965192"/>
-            <a:ext cx="1664208" cy="201168"/>
+            <a:off x="6263637" y="4864608"/>
+            <a:ext cx="1709927" cy="201168"/>
           </a:xfrm>
           <a:prstGeom prst="rect">
             <a:avLst/>
@@ -4415,7 +4415,7 @@
                 <a:latin typeface="Microsoft YaHei"/>
                 <a:ea typeface="Microsoft YaHei"/>
               </a:rPr>
-              <a:t>Prefix-LM A…</a:t>
+              <a:t>细粒度拆分</a:t>
             </a:r>
           </a:p>
         </p:txBody>
@@ -4428,8 +4428,8 @@
         </p:nvSpPr>
         <p:spPr>
           <a:xfrm>
-            <a:off x="6300216" y="5166360"/>
-            <a:ext cx="1664208" cy="237744"/>
+            <a:off x="6263637" y="5065776"/>
+            <a:ext cx="1709927" cy="256032"/>
           </a:xfrm>
           <a:prstGeom prst="rect">
             <a:avLst/>
@@ -4451,7 +4451,7 @@
                 <a:latin typeface="Microsoft YaHei"/>
                 <a:ea typeface="Microsoft YaHei"/>
               </a:rPr>
-              <a:t>端到端训练吞吐约+31%</a:t>
+              <a:t>细粒度拆分：总时延约降83%（49</a:t>
             </a:r>
           </a:p>
         </p:txBody>
@@ -4464,8 +4464,8 @@
         </p:nvSpPr>
         <p:spPr>
           <a:xfrm>
-            <a:off x="6300216" y="5413248"/>
-            <a:ext cx="1664208" cy="292608"/>
+            <a:off x="6263637" y="5340096"/>
+            <a:ext cx="1709927" cy="365760"/>
           </a:xfrm>
           <a:prstGeom prst="rect">
             <a:avLst/>
@@ -4480,14 +4480,14 @@
           <a:p>
             <a:pPr algn="l"/>
             <a:r>
-              <a:rPr sz="1400" b="1">
+              <a:rPr sz="1200" b="1">
                 <a:solidFill>
                   <a:srgbClr val="8B1A2B"/>
                 </a:solidFill>
                 <a:latin typeface="Microsoft YaHei"/>
                 <a:ea typeface="Microsoft YaHei"/>
               </a:rPr>
-              <a:t>端到端训练吞吐约+31%</a:t>
+              <a:t>8），资源利用率约17%→97%</a:t>
             </a:r>
           </a:p>
         </p:txBody>
@@ -4500,8 +4500,8 @@
         </p:nvSpPr>
         <p:spPr>
           <a:xfrm>
-            <a:off x="8147304" y="4910328"/>
-            <a:ext cx="1847088" cy="868680"/>
+            <a:off x="8138156" y="4809744"/>
+            <a:ext cx="1874519" cy="960120"/>
           </a:xfrm>
           <a:prstGeom prst="rect">
             <a:avLst/>
@@ -4545,8 +4545,8 @@
         </p:nvSpPr>
         <p:spPr>
           <a:xfrm>
-            <a:off x="8257032" y="4965192"/>
-            <a:ext cx="1664208" cy="201168"/>
+            <a:off x="8229596" y="4864608"/>
+            <a:ext cx="1709927" cy="201168"/>
           </a:xfrm>
           <a:prstGeom prst="rect">
             <a:avLst/>
@@ -4568,7 +4568,7 @@
                 <a:latin typeface="Microsoft YaHei"/>
                 <a:ea typeface="Microsoft YaHei"/>
               </a:rPr>
-              <a:t>世界模型训练：减少跨卡…</a:t>
+              <a:t>立即拼接</a:t>
             </a:r>
           </a:p>
         </p:txBody>
@@ -4581,8 +4581,8 @@
         </p:nvSpPr>
         <p:spPr>
           <a:xfrm>
-            <a:off x="8257032" y="5166360"/>
-            <a:ext cx="1664208" cy="237744"/>
+            <a:off x="8229596" y="5065776"/>
+            <a:ext cx="1709927" cy="256032"/>
           </a:xfrm>
           <a:prstGeom prst="rect">
             <a:avLst/>
@@ -4604,7 +4604,7 @@
                 <a:latin typeface="Microsoft YaHei"/>
                 <a:ea typeface="Microsoft YaHei"/>
               </a:rPr>
-              <a:t>视角合批：时间约-3.0%，显…</a:t>
+              <a:t>立即拼接：示例时延约降24%（17</a:t>
             </a:r>
           </a:p>
         </p:txBody>
@@ -4617,8 +4617,8 @@
         </p:nvSpPr>
         <p:spPr>
           <a:xfrm>
-            <a:off x="8257032" y="5413248"/>
-            <a:ext cx="1664208" cy="292608"/>
+            <a:off x="8229596" y="5340096"/>
+            <a:ext cx="1709927" cy="365760"/>
           </a:xfrm>
           <a:prstGeom prst="rect">
             <a:avLst/>
@@ -4633,14 +4633,14 @@
           <a:p>
             <a:pPr algn="l"/>
             <a:r>
-              <a:rPr sz="1400" b="1">
+              <a:rPr sz="1200" b="1">
                 <a:solidFill>
                   <a:srgbClr val="8B1A2B"/>
                 </a:solidFill>
                 <a:latin typeface="Microsoft YaHei"/>
                 <a:ea typeface="Microsoft YaHei"/>
               </a:rPr>
-              <a:t>通信量约减少75%</a:t>
+              <a:t>13）</a:t>
             </a:r>
           </a:p>
         </p:txBody>
@@ -4653,8 +4653,8 @@
         </p:nvSpPr>
         <p:spPr>
           <a:xfrm>
-            <a:off x="10104120" y="4910328"/>
-            <a:ext cx="1847088" cy="868680"/>
+            <a:off x="10104115" y="4809744"/>
+            <a:ext cx="1874519" cy="960120"/>
           </a:xfrm>
           <a:prstGeom prst="rect">
             <a:avLst/>
@@ -4698,8 +4698,8 @@
         </p:nvSpPr>
         <p:spPr>
           <a:xfrm>
-            <a:off x="10213848" y="4965192"/>
-            <a:ext cx="1664208" cy="201168"/>
+            <a:off x="10195555" y="4864608"/>
+            <a:ext cx="1709927" cy="201168"/>
           </a:xfrm>
           <a:prstGeom prst="rect">
             <a:avLst/>
@@ -4721,7 +4721,7 @@
                 <a:latin typeface="Microsoft YaHei"/>
                 <a:ea typeface="Microsoft YaHei"/>
               </a:rPr>
-              <a:t>世界模型：算法与工程协…</a:t>
+              <a:t>Prefix-LM Attention优化</a:t>
             </a:r>
           </a:p>
         </p:txBody>
@@ -4734,8 +4734,8 @@
         </p:nvSpPr>
         <p:spPr>
           <a:xfrm>
-            <a:off x="10213848" y="5166360"/>
-            <a:ext cx="1664208" cy="237744"/>
+            <a:off x="10195555" y="5065776"/>
+            <a:ext cx="1709927" cy="256032"/>
           </a:xfrm>
           <a:prstGeom prst="rect">
             <a:avLst/>
@@ -4757,7 +4757,7 @@
                 <a:latin typeface="Microsoft YaHei"/>
                 <a:ea typeface="Microsoft YaHei"/>
               </a:rPr>
-              <a:t>推理速度加速约62%–87%</a:t>
+              <a:t>演讲口径</a:t>
             </a:r>
           </a:p>
         </p:txBody>
@@ -4770,8 +4770,8 @@
         </p:nvSpPr>
         <p:spPr>
           <a:xfrm>
-            <a:off x="10213848" y="5413248"/>
-            <a:ext cx="1664208" cy="292608"/>
+            <a:off x="10195555" y="5340096"/>
+            <a:ext cx="1709927" cy="365760"/>
           </a:xfrm>
           <a:prstGeom prst="rect">
             <a:avLst/>
@@ -4786,14 +4786,14 @@
           <a:p>
             <a:pPr algn="l"/>
             <a:r>
-              <a:rPr sz="1400" b="1">
+              <a:rPr sz="1200" b="1">
                 <a:solidFill>
                   <a:srgbClr val="8B1A2B"/>
                 </a:solidFill>
                 <a:latin typeface="Microsoft YaHei"/>
                 <a:ea typeface="Microsoft YaHei"/>
               </a:rPr>
-              <a:t>训练耗时加速约19%–40%</a:t>
+              <a:t>Attention前向/反向速度约+290%</a:t>
             </a:r>
           </a:p>
         </p:txBody>
@@ -4806,8 +4806,8 @@
         </p:nvSpPr>
         <p:spPr>
           <a:xfrm>
-            <a:off x="0" y="5989320"/>
-            <a:ext cx="12191695" cy="868680"/>
+            <a:off x="0" y="5870448"/>
+            <a:ext cx="12191695" cy="987552"/>
           </a:xfrm>
           <a:prstGeom prst="rect">
             <a:avLst/>
@@ -4849,8 +4849,8 @@
         </p:nvSpPr>
         <p:spPr>
           <a:xfrm>
-            <a:off x="365760" y="6080760"/>
-            <a:ext cx="11430000" cy="256032"/>
+            <a:off x="320040" y="5943600"/>
+            <a:ext cx="11521440" cy="502920"/>
           </a:xfrm>
           <a:prstGeom prst="rect">
             <a:avLst/>
@@ -4865,14 +4865,14 @@
           <a:p>
             <a:pPr algn="l"/>
             <a:r>
-              <a:rPr sz="1200" b="1">
+              <a:rPr sz="1100" b="1">
                 <a:solidFill>
                   <a:srgbClr val="1A1A1A"/>
                 </a:solidFill>
                 <a:latin typeface="Microsoft YaHei"/>
                 <a:ea typeface="Microsoft YaHei"/>
               </a:rPr>
-              <a:t>可落地动作：TurboX把Physical AI加速拆成运行时、数据、算子与算法沉淀，并与PAI训推产品闭环。；世界模型场景的关键增益来自通信形态改造、视角合批、零贡献帧删除与Prefix-LM FlashAttention化；整体训练吞吐可提升约4…</a:t>
+              <a:t>可落地动作：TurboX把Physical AI加速拆成运行时、数据、算子与算法沉淀，并与PAI训推产品闭环；世界模型场景的关键增益来自通信形态改造、视角合批、零贡献帧删除与Prefix-LM FlashAttention化；整体训练吞吐可提升约47%；友商自建加速团队时，应同时交付Doctor级瓶颈定位与可复现Benchmark，避免优化不可迁移。</a:t>
             </a:r>
           </a:p>
         </p:txBody>
@@ -4885,8 +4885,8 @@
         </p:nvSpPr>
         <p:spPr>
           <a:xfrm>
-            <a:off x="365760" y="6373368"/>
-            <a:ext cx="11430000" cy="256032"/>
+            <a:off x="320040" y="6437376"/>
+            <a:ext cx="11521440" cy="256032"/>
           </a:xfrm>
           <a:prstGeom prst="rect">
             <a:avLst/>
@@ -4901,7 +4901,7 @@
           <a:p>
             <a:pPr algn="l"/>
             <a:r>
-              <a:rPr sz="1000" b="0">
+              <a:rPr sz="900" b="0">
                 <a:solidFill>
                   <a:srgbClr val="6B6B6B"/>
                 </a:solidFill>
@@ -5143,7 +5143,7 @@
         <p:spPr>
           <a:xfrm>
             <a:off x="429768" y="1143000"/>
-            <a:ext cx="3496970" cy="292608"/>
+            <a:ext cx="3496970" cy="384048"/>
           </a:xfrm>
           <a:prstGeom prst="rect">
             <a:avLst/>
@@ -5165,7 +5165,7 @@
                 <a:latin typeface="Microsoft YaHei"/>
                 <a:ea typeface="Microsoft YaHei"/>
               </a:rPr>
-              <a:t>TurboX总体架构：工具套件 + 四…</a:t>
+              <a:t>工具套件 + 四层加速 + PAI底座</a:t>
             </a:r>
           </a:p>
         </p:txBody>
@@ -5186,7 +5186,7 @@
         </p:blipFill>
         <p:spPr>
           <a:xfrm>
-            <a:off x="429768" y="1928092"/>
+            <a:off x="429768" y="1946380"/>
             <a:ext cx="3496970" cy="2965239"/>
           </a:xfrm>
           <a:prstGeom prst="rect">
@@ -5225,7 +5225,7 @@
                 <a:latin typeface="Microsoft YaHei"/>
                 <a:ea typeface="Microsoft YaHei"/>
               </a:rPr>
-              <a:t>TurboX总体架构：工具套件 + 四层加速 + PA…</a:t>
+              <a:t>TurboX总体架构：工具套件 + 四层加速 + PAI底座</a:t>
             </a:r>
           </a:p>
         </p:txBody>
@@ -5284,7 +5284,7 @@
         <p:spPr>
           <a:xfrm>
             <a:off x="4347362" y="1143000"/>
-            <a:ext cx="3496970" cy="292608"/>
+            <a:ext cx="3496970" cy="384048"/>
           </a:xfrm>
           <a:prstGeom prst="rect">
             <a:avLst/>
@@ -5306,7 +5306,7 @@
                 <a:latin typeface="Microsoft YaHei"/>
                 <a:ea typeface="Microsoft YaHei"/>
               </a:rPr>
-              <a:t>计算瓶颈画像：数据、算子、显存与通信</a:t>
+              <a:t>数据、算子、显存与通信</a:t>
             </a:r>
           </a:p>
         </p:txBody>
@@ -5327,7 +5327,7 @@
         </p:blipFill>
         <p:spPr>
           <a:xfrm>
-            <a:off x="4347362" y="1928092"/>
+            <a:off x="4347362" y="1946380"/>
             <a:ext cx="3496970" cy="2965239"/>
           </a:xfrm>
           <a:prstGeom prst="rect">
@@ -5425,7 +5425,7 @@
         <p:spPr>
           <a:xfrm>
             <a:off x="8264956" y="1143000"/>
-            <a:ext cx="3496970" cy="292608"/>
+            <a:ext cx="3496970" cy="384048"/>
           </a:xfrm>
           <a:prstGeom prst="rect">
             <a:avLst/>
@@ -5447,7 +5447,7 @@
                 <a:latin typeface="Microsoft YaHei"/>
                 <a:ea typeface="Microsoft YaHei"/>
               </a:rPr>
-              <a:t>立即拼接：示例时延约降24%（17…</a:t>
+              <a:t>流式处理时延约降56%（示例对比54→24） · 细粒度拆分：总时延约降83%（49→8），资源利用率约17%→97%</a:t>
             </a:r>
           </a:p>
         </p:txBody>
@@ -5468,7 +5468,7 @@
         </p:blipFill>
         <p:spPr>
           <a:xfrm>
-            <a:off x="8264956" y="1928092"/>
+            <a:off x="8264956" y="1946380"/>
             <a:ext cx="3496970" cy="2965239"/>
           </a:xfrm>
           <a:prstGeom prst="rect">

--- a/yunqi-2026-pai-forum/docs/洞察一页-09-从VLA到世界模型：PAI-TurboX加速方案.pptx
+++ b/yunqi-2026-pai-forum/docs/洞察一页-09-从VLA到世界模型：PAI-TurboX加速方案.pptx
@@ -3323,7 +3323,7 @@
                 <a:latin typeface="Microsoft YaHei"/>
                 <a:ea typeface="Microsoft YaHei"/>
               </a:rPr>
-              <a:t>一句话判断：施兴介绍阿里云PAI上的Physical AI加速方案TurboX：覆盖具身智能、智驾训练与世界模型。针对数据供给、算子搬运、显存重算与跨卡通信四类瓶颈，给出流式数据管线、Prefix-LM Attention拆分、All-to-All通信与零贡献帧删除等优化，并在世界模型训推上给出显著加速数字与CornerCase多视角生成能力。</a:t>
+              <a:t>一句话判断：阿里云 PAI-TurboX / Physical AI——覆盖具身智能、智驾训练与世界模型。针对数据供给、算子搬运、显存重算与跨卡通信四类瓶颈，给出流式数据管线、Prefix-LM Attention拆分、All-to-All通信与零贡献帧删除等优化，并在世界模型训推上给出显著加速数字与CornerCase多视角生成能力。</a:t>
             </a:r>
           </a:p>
         </p:txBody>
@@ -3956,7 +3956,7 @@
                 <a:latin typeface="Microsoft YaHei"/>
                 <a:ea typeface="Microsoft YaHei"/>
               </a:rPr>
-              <a:t>TurboX总体架构</a:t>
+              <a:t>通信量约减少</a:t>
             </a:r>
           </a:p>
         </p:txBody>
@@ -3992,7 +3992,7 @@
                 <a:latin typeface="Microsoft YaHei"/>
                 <a:ea typeface="Microsoft YaHei"/>
               </a:rPr>
-              <a:t>核心口径</a:t>
+              <a:t>减少跨卡传输与重复调用</a:t>
             </a:r>
           </a:p>
         </p:txBody>
@@ -4028,7 +4028,7 @@
                 <a:latin typeface="Microsoft YaHei"/>
                 <a:ea typeface="Microsoft YaHei"/>
               </a:rPr>
-              <a:t>应用域：具身智能（数据管线/GR00T/Pi/VLA）、智驾训练（BEV系列/UniAD/Sparse4D）、世界模型（Wan Multiview/Cosmos）。</a:t>
+              <a:t>75%</a:t>
             </a:r>
           </a:p>
         </p:txBody>
@@ -4109,7 +4109,7 @@
                 <a:latin typeface="Microsoft YaHei"/>
                 <a:ea typeface="Microsoft YaHei"/>
               </a:rPr>
-              <a:t>数据、算子、显存与通信</a:t>
+              <a:t>端到端训练吞吐</a:t>
             </a:r>
           </a:p>
         </p:txBody>
@@ -4145,7 +4145,7 @@
                 <a:latin typeface="Microsoft YaHei"/>
                 <a:ea typeface="Microsoft YaHei"/>
               </a:rPr>
-              <a:t>核心口径</a:t>
+              <a:t>Prefix-LM Attention优化</a:t>
             </a:r>
           </a:p>
         </p:txBody>
@@ -4181,7 +4181,7 @@
                 <a:latin typeface="Microsoft YaHei"/>
                 <a:ea typeface="Microsoft YaHei"/>
               </a:rPr>
-              <a:t>数据供给与调度：具身视频管线/智驾与VLA训练中</a:t>
+              <a:t>约+31%</a:t>
             </a:r>
           </a:p>
         </p:txBody>
@@ -4262,7 +4262,7 @@
                 <a:latin typeface="Microsoft YaHei"/>
                 <a:ea typeface="Microsoft YaHei"/>
               </a:rPr>
-              <a:t>流式并行与资源协同</a:t>
+              <a:t>整体训练吞吐提升</a:t>
             </a:r>
           </a:p>
         </p:txBody>
@@ -4298,7 +4298,7 @@
                 <a:latin typeface="Microsoft YaHei"/>
                 <a:ea typeface="Microsoft YaHei"/>
               </a:rPr>
-              <a:t>流式处理时延约降56%（示例对比54</a:t>
+              <a:t>减少跨卡传输与重复调用</a:t>
             </a:r>
           </a:p>
         </p:txBody>
@@ -4334,7 +4334,7 @@
                 <a:latin typeface="Microsoft YaHei"/>
                 <a:ea typeface="Microsoft YaHei"/>
               </a:rPr>
-              <a:t>24）</a:t>
+              <a:t>约47%</a:t>
             </a:r>
           </a:p>
         </p:txBody>
@@ -4415,7 +4415,7 @@
                 <a:latin typeface="Microsoft YaHei"/>
                 <a:ea typeface="Microsoft YaHei"/>
               </a:rPr>
-              <a:t>细粒度拆分</a:t>
+              <a:t>训练耗时加速</a:t>
             </a:r>
           </a:p>
         </p:txBody>
@@ -4451,7 +4451,7 @@
                 <a:latin typeface="Microsoft YaHei"/>
                 <a:ea typeface="Microsoft YaHei"/>
               </a:rPr>
-              <a:t>细粒度拆分：总时延约降83%（49</a:t>
+              <a:t>算法与工程协同加速</a:t>
             </a:r>
           </a:p>
         </p:txBody>
@@ -4487,7 +4487,7 @@
                 <a:latin typeface="Microsoft YaHei"/>
                 <a:ea typeface="Microsoft YaHei"/>
               </a:rPr>
-              <a:t>8），资源利用率约17%→97%</a:t>
+              <a:t>约19%–40%</a:t>
             </a:r>
           </a:p>
         </p:txBody>
@@ -4568,7 +4568,7 @@
                 <a:latin typeface="Microsoft YaHei"/>
                 <a:ea typeface="Microsoft YaHei"/>
               </a:rPr>
-              <a:t>立即拼接</a:t>
+              <a:t>推理速度加速</a:t>
             </a:r>
           </a:p>
         </p:txBody>
@@ -4604,7 +4604,7 @@
                 <a:latin typeface="Microsoft YaHei"/>
                 <a:ea typeface="Microsoft YaHei"/>
               </a:rPr>
-              <a:t>立即拼接：示例时延约降24%（17</a:t>
+              <a:t>算法与工程协同加速</a:t>
             </a:r>
           </a:p>
         </p:txBody>
@@ -4640,7 +4640,7 @@
                 <a:latin typeface="Microsoft YaHei"/>
                 <a:ea typeface="Microsoft YaHei"/>
               </a:rPr>
-              <a:t>13）</a:t>
+              <a:t>约62%–87%</a:t>
             </a:r>
           </a:p>
         </p:txBody>
@@ -4721,7 +4721,7 @@
                 <a:latin typeface="Microsoft YaHei"/>
                 <a:ea typeface="Microsoft YaHei"/>
               </a:rPr>
-              <a:t>Prefix-LM Attention优化</a:t>
+              <a:t>流式并行与资源协同</a:t>
             </a:r>
           </a:p>
         </p:txBody>
@@ -4757,7 +4757,7 @@
                 <a:latin typeface="Microsoft YaHei"/>
                 <a:ea typeface="Microsoft YaHei"/>
               </a:rPr>
-              <a:t>演讲口径</a:t>
+              <a:t>立即拼接：示例时延约降24%（17</a:t>
             </a:r>
           </a:p>
         </p:txBody>
@@ -4793,7 +4793,7 @@
                 <a:latin typeface="Microsoft YaHei"/>
                 <a:ea typeface="Microsoft YaHei"/>
               </a:rPr>
-              <a:t>Attention前向/反向速度约+290%</a:t>
+              <a:t>13）</a:t>
             </a:r>
           </a:p>
         </p:txBody>
@@ -4872,7 +4872,7 @@
                 <a:latin typeface="Microsoft YaHei"/>
                 <a:ea typeface="Microsoft YaHei"/>
               </a:rPr>
-              <a:t>可落地动作：TurboX把Physical AI加速拆成运行时、数据、算子与算法沉淀，并与PAI训推产品闭环；世界模型场景的关键增益来自通信形态改造、视角合批、零贡献帧删除与Prefix-LM FlashAttention化；整体训练吞吐可提升约47%；友商自建加速团队时，应同时交付Doctor级瓶颈定位与可复现Benchmark，避免优化不可迁移。</a:t>
+              <a:t>启示要点：TurboX把Physical AI加速拆成运行时、数据、算子与算法沉淀，并与PAI训推产品闭环；世界模型场景的关键增益来自通信形态改造、视角合批、零贡献帧删除与Prefix-LM FlashAttention化；整体训练吞吐可提升约47%；友商自建加速团队时，应同时交付Doctor级瓶颈定位与可复现Benchmark，避免优化不可迁移。</a:t>
             </a:r>
           </a:p>
         </p:txBody>

--- a/yunqi-2026-pai-forum/docs/洞察一页-09-从VLA到世界模型：PAI-TurboX加速方案.pptx
+++ b/yunqi-2026-pai-forum/docs/洞察一页-09-从VLA到世界模型：PAI-TurboX加速方案.pptx
@@ -4872,7 +4872,7 @@
                 <a:latin typeface="Microsoft YaHei"/>
                 <a:ea typeface="Microsoft YaHei"/>
               </a:rPr>
-              <a:t>启示要点：TurboX把Physical AI加速拆成运行时、数据、算子与算法沉淀，并与PAI训推产品闭环；世界模型场景的关键增益来自通信形态改造、视角合批、零贡献帧删除与Prefix-LM FlashAttention化；整体训练吞吐可提升约47%；友商自建加速团队时，应同时交付Doctor级瓶颈定位与可复现Benchmark，避免优化不可迁移。</a:t>
+              <a:t>启示要点：TurboX把Physical AI加速拆成运行时、数据、算子与算法沉淀，并与PAI训推产品闭环；世界模型场景的关键增益来自通信形态改造、视角合批、零贡献帧删除与Prefix-LM FlashAttention化；整体训练吞吐可提升约47%。</a:t>
             </a:r>
           </a:p>
         </p:txBody>
